--- a/presentacion_hardening_sgbd_actualizada.pptx
+++ b/presentacion_hardening_sgbd_actualizada.pptx
@@ -4233,6 +4233,9 @@
       </p:sp>
     </p:spTree>
   </p:cSld>
+  <p:transition spd="med">
+    <p:zoom/>
+  </p:transition>
   <p:clrMapOvr>
     <a:masterClrMapping/>
   </p:clrMapOvr>
@@ -5355,6 +5358,9 @@
       </p:sp>
     </p:spTree>
   </p:cSld>
+  <p:transition spd="med">
+    <p:wipe dir="r"/>
+  </p:transition>
   <p:clrMapOvr>
     <a:masterClrMapping/>
   </p:clrMapOvr>
@@ -6149,6 +6155,9 @@
       </p:sp>
     </p:spTree>
   </p:cSld>
+  <p:transition spd="med">
+    <p:push dir="l"/>
+  </p:transition>
   <p:clrMapOvr>
     <a:masterClrMapping/>
   </p:clrMapOvr>
@@ -6927,6 +6936,9 @@
       </p:sp>
     </p:spTree>
   </p:cSld>
+  <p:transition spd="med">
+    <p:fade/>
+  </p:transition>
   <p:clrMapOvr>
     <a:masterClrMapping/>
   </p:clrMapOvr>
@@ -7705,6 +7717,9 @@
       </p:sp>
     </p:spTree>
   </p:cSld>
+  <p:transition spd="med">
+    <p:split dir="in"/>
+  </p:transition>
   <p:clrMapOvr>
     <a:masterClrMapping/>
   </p:clrMapOvr>
@@ -8483,6 +8498,9 @@
       </p:sp>
     </p:spTree>
   </p:cSld>
+  <p:transition spd="med">
+    <p:wheel/>
+  </p:transition>
   <p:clrMapOvr>
     <a:masterClrMapping/>
   </p:clrMapOvr>
@@ -9261,6 +9279,9 @@
       </p:sp>
     </p:spTree>
   </p:cSld>
+  <p:transition spd="med">
+    <p:push dir="u"/>
+  </p:transition>
   <p:clrMapOvr>
     <a:masterClrMapping/>
   </p:clrMapOvr>
@@ -10071,6 +10092,9 @@
       </p:sp>
     </p:spTree>
   </p:cSld>
+  <p:transition spd="med">
+    <p:checker/>
+  </p:transition>
   <p:clrMapOvr>
     <a:masterClrMapping/>
   </p:clrMapOvr>
